--- a/PPT-version/AI-Ops/AI-Ops-讲义.pptx
+++ b/PPT-version/AI-Ops/AI-Ops-讲义.pptx
@@ -4647,7 +4647,7 @@
                 </a:solidFill>
                 <a:latin typeface="Calibri"/>
               </a:rPr>
-              <a:t>报出标准现状的精确口径：gen_ai.client span 已稳定（2026 年初），agent span 仍实验但实践已稳</a:t>
+              <a:t>报出标准现状的精确口径：gen_ai.* 已整体迁入独立仓（2026-06），全部约定仍 Development、无 Stable</a:t>
             </a:r>
           </a:p>
         </p:txBody>
@@ -5210,7 +5210,7 @@
                 </a:solidFill>
                 <a:latin typeface="Calibri"/>
               </a:rPr>
-              <a:t>标准状态（2026-07）</a:t>
+              <a:t>标准状态（2026-08）</a:t>
             </a:r>
           </a:p>
         </p:txBody>
@@ -5375,7 +5375,7 @@
                 </a:solidFill>
                 <a:latin typeface="Calibri"/>
               </a:rPr>
-              <a:t>✅ 已稳定（2026 年初出实验期）</a:t>
+              <a:t>实验态，实践已稳（未 Stable）</a:t>
             </a:r>
           </a:p>
         </p:txBody>
@@ -5960,7 +5960,7 @@
                 </a:solidFill>
                 <a:latin typeface="Calibri"/>
               </a:rPr>
-              <a:t>对客的精确口径值钱：「client span 已稳定、agent span 实验中但 Q1 以来很稳」——多数属性仍带 Development 标签，命名可能变，封装一层再用。</a:t>
+              <a:t>对客的精确口径值钱：「gen_ai.* 已整体迁入独立仓（2026-06，semconv v1.42.0），全部仍 Development、无 Stable」——命名仍可能变，封装一层再用。</a:t>
             </a:r>
           </a:p>
         </p:txBody>
@@ -8557,7 +8557,7 @@
                 </a:solidFill>
                 <a:latin typeface="Calibri"/>
               </a:rPr>
-              <a:t>走 OTel GenAI 语义约定：client span 已是稳定标准，agent 侧仍在实验期但实践稳定。好处是不锁定——换观测后端不用改埋点，这正是标准的价值。</a:t>
+              <a:t>走 OTel GenAI 语义约定：标准已整体迁入独立仓、暂无 Stable 版，我们封装一层跟进演进。好处是不锁定——换观测后端不用改埋点，这正是标准的价值。</a:t>
             </a:r>
           </a:p>
         </p:txBody>
@@ -9137,7 +9137,7 @@
                 </a:solidFill>
                 <a:latin typeface="Calibri"/>
               </a:rPr>
-              <a:t>agent / workflow / tool / model——client span 已稳定，其余实验但实践稳。</a:t>
+              <a:t>agent / workflow / tool / model——已迁独立仓，全部仍实验态但实践稳。</a:t>
             </a:r>
           </a:p>
         </p:txBody>
@@ -10208,7 +10208,7 @@
                 </a:solidFill>
                 <a:latin typeface="Calibri"/>
               </a:rPr>
-              <a:t>span 四类解剖、client span 已稳定、一条请求的旅程、PII</a:t>
+              <a:t>span 四类解剖、标准已迁独立仓、一条请求的旅程、PII</a:t>
             </a:r>
           </a:p>
         </p:txBody>

--- a/PPT-version/AI-Ops/AI-Ops-讲义.pptx
+++ b/PPT-version/AI-Ops/AI-Ops-讲义.pptx
@@ -31764,7 +31764,7 @@
                 </a:solidFill>
                 <a:latin typeface="Calibri"/>
               </a:rPr>
-              <a:t>讲清两个专用补充：Braintrust（评估一体）与 AgentOps（会话回放、循环检测）</a:t>
+              <a:t>讲清两个专用补充：Braintrust（评估一体）与 AgentOps（会话回放；循环检测在路线图）</a:t>
             </a:r>
           </a:p>
         </p:txBody>
@@ -33771,7 +33771,7 @@
                 </a:solidFill>
                 <a:latin typeface="Calibri"/>
               </a:rPr>
-              <a:t>免费档最慷慨：1M span/月 + 10K eval</a:t>
+              <a:t>免费档：1GB 处理数据/月 + 10k scores（非 span 口径）</a:t>
             </a:r>
           </a:p>
         </p:txBody>
@@ -33921,7 +33921,7 @@
                 </a:solidFill>
                 <a:latin typeface="Calibri"/>
               </a:rPr>
-              <a:t>签名功能：会话回放（time-travel debugging）</a:t>
+              <a:t>签名功能：会话回放（Session replays）</a:t>
             </a:r>
           </a:p>
           <a:p>
